--- a/pres-bigdata/Hands-On/TD2-part1-spark-read-write.pptx
+++ b/pres-bigdata/Hands-On/TD2-part1-spark-read-write.pptx
@@ -342,7 +342,7 @@
           <a:p>
             <a:fld id="{F68A345C-DDF1-46AA-AE20-BB9626A0470D}" type="datetimeFigureOut">
               <a:rPr lang="fr-FR" smtClean="0"/>
-              <a:t>01/10/2025</a:t>
+              <a:t>02/10/2026</a:t>
             </a:fld>
             <a:endParaRPr lang="fr-FR"/>
           </a:p>
@@ -542,7 +542,7 @@
           <a:p>
             <a:fld id="{F68A345C-DDF1-46AA-AE20-BB9626A0470D}" type="datetimeFigureOut">
               <a:rPr lang="fr-FR" smtClean="0"/>
-              <a:t>01/10/2025</a:t>
+              <a:t>02/10/2026</a:t>
             </a:fld>
             <a:endParaRPr lang="fr-FR"/>
           </a:p>
@@ -752,7 +752,7 @@
           <a:p>
             <a:fld id="{F68A345C-DDF1-46AA-AE20-BB9626A0470D}" type="datetimeFigureOut">
               <a:rPr lang="fr-FR" smtClean="0"/>
-              <a:t>01/10/2025</a:t>
+              <a:t>02/10/2026</a:t>
             </a:fld>
             <a:endParaRPr lang="fr-FR"/>
           </a:p>
@@ -952,7 +952,7 @@
           <a:p>
             <a:fld id="{F68A345C-DDF1-46AA-AE20-BB9626A0470D}" type="datetimeFigureOut">
               <a:rPr lang="fr-FR" smtClean="0"/>
-              <a:t>01/10/2025</a:t>
+              <a:t>02/10/2026</a:t>
             </a:fld>
             <a:endParaRPr lang="fr-FR"/>
           </a:p>
@@ -1228,7 +1228,7 @@
           <a:p>
             <a:fld id="{F68A345C-DDF1-46AA-AE20-BB9626A0470D}" type="datetimeFigureOut">
               <a:rPr lang="fr-FR" smtClean="0"/>
-              <a:t>01/10/2025</a:t>
+              <a:t>02/10/2026</a:t>
             </a:fld>
             <a:endParaRPr lang="fr-FR"/>
           </a:p>
@@ -1496,7 +1496,7 @@
           <a:p>
             <a:fld id="{F68A345C-DDF1-46AA-AE20-BB9626A0470D}" type="datetimeFigureOut">
               <a:rPr lang="fr-FR" smtClean="0"/>
-              <a:t>01/10/2025</a:t>
+              <a:t>02/10/2026</a:t>
             </a:fld>
             <a:endParaRPr lang="fr-FR"/>
           </a:p>
@@ -1911,7 +1911,7 @@
           <a:p>
             <a:fld id="{F68A345C-DDF1-46AA-AE20-BB9626A0470D}" type="datetimeFigureOut">
               <a:rPr lang="fr-FR" smtClean="0"/>
-              <a:t>01/10/2025</a:t>
+              <a:t>02/10/2026</a:t>
             </a:fld>
             <a:endParaRPr lang="fr-FR"/>
           </a:p>
@@ -2053,7 +2053,7 @@
           <a:p>
             <a:fld id="{F68A345C-DDF1-46AA-AE20-BB9626A0470D}" type="datetimeFigureOut">
               <a:rPr lang="fr-FR" smtClean="0"/>
-              <a:t>01/10/2025</a:t>
+              <a:t>02/10/2026</a:t>
             </a:fld>
             <a:endParaRPr lang="fr-FR"/>
           </a:p>
@@ -2166,7 +2166,7 @@
           <a:p>
             <a:fld id="{F68A345C-DDF1-46AA-AE20-BB9626A0470D}" type="datetimeFigureOut">
               <a:rPr lang="fr-FR" smtClean="0"/>
-              <a:t>01/10/2025</a:t>
+              <a:t>02/10/2026</a:t>
             </a:fld>
             <a:endParaRPr lang="fr-FR"/>
           </a:p>
@@ -2479,7 +2479,7 @@
           <a:p>
             <a:fld id="{F68A345C-DDF1-46AA-AE20-BB9626A0470D}" type="datetimeFigureOut">
               <a:rPr lang="fr-FR" smtClean="0"/>
-              <a:t>01/10/2025</a:t>
+              <a:t>02/10/2026</a:t>
             </a:fld>
             <a:endParaRPr lang="fr-FR"/>
           </a:p>
@@ -2768,7 +2768,7 @@
           <a:p>
             <a:fld id="{F68A345C-DDF1-46AA-AE20-BB9626A0470D}" type="datetimeFigureOut">
               <a:rPr lang="fr-FR" smtClean="0"/>
-              <a:t>01/10/2025</a:t>
+              <a:t>02/10/2026</a:t>
             </a:fld>
             <a:endParaRPr lang="fr-FR"/>
           </a:p>
@@ -3011,7 +3011,7 @@
           <a:p>
             <a:fld id="{F68A345C-DDF1-46AA-AE20-BB9626A0470D}" type="datetimeFigureOut">
               <a:rPr lang="fr-FR" smtClean="0"/>
-              <a:t>01/10/2025</a:t>
+              <a:t>02/10/2026</a:t>
             </a:fld>
             <a:endParaRPr lang="fr-FR"/>
           </a:p>
@@ -3539,7 +3539,7 @@
             </a:r>
             <a:r>
               <a:rPr lang="fr-FR" dirty="0"/>
-              <a:t> 2025</a:t>
+              <a:t> 2026</a:t>
             </a:r>
           </a:p>
         </p:txBody>
@@ -7341,7 +7341,7 @@
           <a:graphicData uri="http://schemas.openxmlformats.org/presentationml/2006/ole">
             <mc:AlternateContent xmlns:mc="http://schemas.openxmlformats.org/markup-compatibility/2006">
               <mc:Choice xmlns:v="urn:schemas-microsoft-com:vml" Requires="v">
-                <p:oleObj spid="_x0000_s1041" name="Bitmap Image" r:id="rId3" imgW="1588680" imgH="457200" progId="PBrush">
+                <p:oleObj spid="_x0000_s1043" name="Bitmap Image" r:id="rId3" imgW="1588680" imgH="457200" progId="PBrush">
                   <p:embed/>
                 </p:oleObj>
               </mc:Choice>
